--- a/Bloc3_Automatic-Fraud-Detection.pptx
+++ b/Bloc3_Automatic-Fraud-Detection.pptx
@@ -17995,7 +17995,7 @@
             </a:br>
             <a:r>
               <a:rPr lang="fr-FR" sz="1200" dirty="0"/>
-              <a:t>Seuil production : 0.90</a:t>
+              <a:t>Seuil de production : 0.90</a:t>
             </a:r>
             <a:br>
               <a:rPr lang="fr-FR" sz="1200" dirty="0"/>
@@ -18559,7 +18559,7 @@
         </p:nvSpPr>
         <p:spPr>
           <a:xfrm>
-            <a:off x="360378" y="700424"/>
+            <a:off x="360378" y="922630"/>
             <a:ext cx="8660780" cy="276999"/>
           </a:xfrm>
           <a:prstGeom prst="rect">
@@ -18594,7 +18594,7 @@
         </p:nvSpPr>
         <p:spPr>
           <a:xfrm>
-            <a:off x="2921551" y="4590600"/>
+            <a:off x="2921550" y="4233706"/>
             <a:ext cx="3300897" cy="276999"/>
           </a:xfrm>
           <a:prstGeom prst="rect">
@@ -18634,10 +18634,10 @@
         </p:nvGrpSpPr>
         <p:grpSpPr>
           <a:xfrm>
-            <a:off x="343832" y="1042537"/>
-            <a:ext cx="8402976" cy="3392800"/>
-            <a:chOff x="343832" y="1217556"/>
-            <a:chExt cx="8402976" cy="3392800"/>
+            <a:off x="231300" y="1284559"/>
+            <a:ext cx="8739594" cy="2667667"/>
+            <a:chOff x="231300" y="1032924"/>
+            <a:chExt cx="8739594" cy="2667667"/>
           </a:xfrm>
         </p:grpSpPr>
         <p:sp>
@@ -18654,8 +18654,8 @@
           </p:nvSpPr>
           <p:spPr>
             <a:xfrm>
-              <a:off x="343832" y="1295844"/>
-              <a:ext cx="2286000" cy="830997"/>
+              <a:off x="231300" y="1032924"/>
+              <a:ext cx="2020227" cy="830997"/>
             </a:xfrm>
             <a:prstGeom prst="rect">
               <a:avLst/>
@@ -18703,8 +18703,8 @@
           </p:nvSpPr>
           <p:spPr>
             <a:xfrm>
-              <a:off x="6460808" y="1295395"/>
-              <a:ext cx="2286000" cy="830997"/>
+              <a:off x="7089876" y="1034099"/>
+              <a:ext cx="1881018" cy="830997"/>
             </a:xfrm>
             <a:prstGeom prst="rect">
               <a:avLst/>
@@ -18752,8 +18752,8 @@
           </p:nvSpPr>
           <p:spPr>
             <a:xfrm>
-              <a:off x="3213348" y="1217556"/>
-              <a:ext cx="2663944" cy="1938992"/>
+              <a:off x="2448930" y="1032924"/>
+              <a:ext cx="4443543" cy="1754326"/>
             </a:xfrm>
             <a:prstGeom prst="rect">
               <a:avLst/>
@@ -18776,7 +18776,7 @@
               </a:pPr>
               <a:r>
                 <a:rPr lang="fr-FR" sz="1200" b="1" dirty="0"/>
-                <a:t>Critères de comparaison</a:t>
+                <a:t>Règles de promotion :</a:t>
               </a:r>
             </a:p>
             <a:p>
@@ -18791,8 +18791,12 @@
                 <a:buChar char="-"/>
               </a:pPr>
               <a:r>
+                <a:rPr lang="fr-FR" sz="1200" dirty="0" err="1"/>
+                <a:t>average_precision</a:t>
+              </a:r>
+              <a:r>
                 <a:rPr lang="fr-FR" sz="1200" dirty="0"/>
-                <a:t>average_precision</a:t>
+                <a:t> : challenger ≥ champion + 0.01</a:t>
               </a:r>
             </a:p>
             <a:p>
@@ -18801,8 +18805,12 @@
                 <a:buChar char="-"/>
               </a:pPr>
               <a:r>
+                <a:rPr lang="fr-FR" sz="1200" dirty="0" err="1"/>
+                <a:t>recall</a:t>
+              </a:r>
+              <a:r>
                 <a:rPr lang="fr-FR" sz="1200" dirty="0"/>
-                <a:t>recall fraude au seuil de production : 0.90</a:t>
+                <a:t> fraude : challenger ≥ champion - 0.02</a:t>
               </a:r>
             </a:p>
             <a:p>
@@ -18811,8 +18819,12 @@
                 <a:buChar char="-"/>
               </a:pPr>
               <a:r>
+                <a:rPr lang="fr-FR" sz="1200" dirty="0" err="1"/>
+                <a:t>precision</a:t>
+              </a:r>
+              <a:r>
                 <a:rPr lang="fr-FR" sz="1200" dirty="0"/>
-                <a:t>precision fraude au seuil de production : 0.90</a:t>
+                <a:t> fraude : challenger ≥ champion + 0.01</a:t>
               </a:r>
             </a:p>
             <a:p>
@@ -18829,9 +18841,12 @@
               </a:r>
             </a:p>
             <a:p>
+              <a:endParaRPr lang="fr-FR" sz="1200" b="1" dirty="0"/>
+            </a:p>
+            <a:p>
               <a:r>
                 <a:rPr lang="fr-FR" sz="1200" dirty="0"/>
-                <a:t>- Proba fraude &gt;= 0.90</a:t>
+                <a:t>- Probabilité de fraude ≥ 0.90</a:t>
               </a:r>
             </a:p>
           </p:txBody>
@@ -18846,6 +18861,7 @@
               </a:extLst>
             </p:cNvPr>
             <p:cNvCxnSpPr>
+              <a:cxnSpLocks/>
               <a:stCxn id="5" idx="2"/>
               <a:endCxn id="11" idx="1"/>
             </p:cNvCxnSpPr>
@@ -18853,8 +18869,8 @@
           </p:nvCxnSpPr>
           <p:spPr>
             <a:xfrm rot="16200000" flipH="1">
-              <a:off x="1784313" y="1829359"/>
-              <a:ext cx="1341569" cy="1936531"/>
+              <a:off x="1731093" y="1374242"/>
+              <a:ext cx="1229270" cy="2208628"/>
             </a:xfrm>
             <a:prstGeom prst="bentConnector2">
               <a:avLst/>
@@ -18891,6 +18907,7 @@
               </a:extLst>
             </p:cNvPr>
             <p:cNvCxnSpPr>
+              <a:cxnSpLocks/>
               <a:stCxn id="7" idx="2"/>
               <a:endCxn id="11" idx="3"/>
             </p:cNvCxnSpPr>
@@ -18898,8 +18915,8 @@
           </p:nvCxnSpPr>
           <p:spPr>
             <a:xfrm rot="5400000">
-              <a:off x="5964534" y="1829136"/>
-              <a:ext cx="1342018" cy="1936531"/>
+              <a:off x="6248124" y="1310929"/>
+              <a:ext cx="1228095" cy="2336429"/>
             </a:xfrm>
             <a:prstGeom prst="bentConnector2">
               <a:avLst/>
@@ -18940,10 +18957,10 @@
           </p:nvGrpSpPr>
           <p:grpSpPr>
             <a:xfrm>
-              <a:off x="3213348" y="3329910"/>
-              <a:ext cx="2663944" cy="1280446"/>
-              <a:chOff x="3213348" y="3370933"/>
-              <a:chExt cx="2663944" cy="1280446"/>
+              <a:off x="3213348" y="2954691"/>
+              <a:ext cx="2480608" cy="745900"/>
+              <a:chOff x="3213348" y="2995714"/>
+              <a:chExt cx="2480608" cy="745900"/>
             </a:xfrm>
           </p:grpSpPr>
           <p:sp>
@@ -18960,7 +18977,7 @@
             </p:nvSpPr>
             <p:spPr>
               <a:xfrm>
-                <a:off x="3423363" y="3370933"/>
+                <a:off x="3450042" y="2995714"/>
                 <a:ext cx="2243914" cy="276999"/>
               </a:xfrm>
               <a:prstGeom prst="rect">
@@ -19004,10 +19021,10 @@
             </p:nvGrpSpPr>
             <p:grpSpPr>
               <a:xfrm>
-                <a:off x="3213348" y="4374380"/>
-                <a:ext cx="2663944" cy="276999"/>
-                <a:chOff x="3101804" y="4318696"/>
-                <a:chExt cx="2653455" cy="276999"/>
+                <a:off x="3213348" y="3456028"/>
+                <a:ext cx="2480608" cy="285586"/>
+                <a:chOff x="3101804" y="3400344"/>
+                <a:chExt cx="2470841" cy="285586"/>
               </a:xfrm>
             </p:grpSpPr>
             <p:sp>
@@ -19024,7 +19041,7 @@
               </p:nvSpPr>
               <p:spPr>
                 <a:xfrm>
-                  <a:off x="3101804" y="4318696"/>
+                  <a:off x="3101804" y="3408931"/>
                   <a:ext cx="1070579" cy="276999"/>
                 </a:xfrm>
                 <a:prstGeom prst="rect">
@@ -19068,7 +19085,7 @@
               </p:nvSpPr>
               <p:spPr>
                 <a:xfrm>
-                  <a:off x="4971619" y="4318696"/>
+                  <a:off x="4789005" y="3400344"/>
                   <a:ext cx="783640" cy="276999"/>
                 </a:xfrm>
                 <a:prstGeom prst="rect">
@@ -19115,7 +19132,7 @@
               </p:nvSpPr>
               <p:spPr>
                 <a:xfrm>
-                  <a:off x="4387442" y="4318696"/>
+                  <a:off x="4288183" y="3408931"/>
                   <a:ext cx="353188" cy="276999"/>
                 </a:xfrm>
                 <a:prstGeom prst="rect">
@@ -19154,8 +19171,8 @@
             </p:nvCxnSpPr>
             <p:spPr>
               <a:xfrm flipH="1">
-                <a:off x="3750754" y="3647932"/>
-                <a:ext cx="794566" cy="726448"/>
+                <a:off x="3750754" y="3272713"/>
+                <a:ext cx="821245" cy="191902"/>
               </a:xfrm>
               <a:prstGeom prst="straightConnector1">
                 <a:avLst/>
@@ -19192,6 +19209,7 @@
                 </a:extLst>
               </p:cNvPr>
               <p:cNvCxnSpPr>
+                <a:cxnSpLocks/>
                 <a:stCxn id="11" idx="2"/>
                 <a:endCxn id="15" idx="0"/>
               </p:cNvCxnSpPr>
@@ -19199,8 +19217,8 @@
             </p:nvCxnSpPr>
             <p:spPr>
               <a:xfrm>
-                <a:off x="4545320" y="3647932"/>
-                <a:ext cx="938603" cy="726448"/>
+                <a:off x="4571999" y="3272713"/>
+                <a:ext cx="728588" cy="183315"/>
               </a:xfrm>
               <a:prstGeom prst="straightConnector1">
                 <a:avLst/>
@@ -19229,42 +19247,6 @@
           </p:cxnSp>
         </p:grpSp>
       </p:grpSp>
-      <p:sp>
-        <p:nvSpPr>
-          <p:cNvPr id="29" name="ZoneTexte 28">
-            <a:extLst>
-              <a:ext uri="{FF2B5EF4-FFF2-40B4-BE49-F238E27FC236}">
-                <a16:creationId xmlns:a16="http://schemas.microsoft.com/office/drawing/2014/main" id="{A2B4F4D7-C50E-702C-222D-3083C70073F5}"/>
-              </a:ext>
-            </a:extLst>
-          </p:cNvPr>
-          <p:cNvSpPr txBox="1"/>
-          <p:nvPr/>
-        </p:nvSpPr>
-        <p:spPr>
-          <a:xfrm>
-            <a:off x="74761" y="3516985"/>
-            <a:ext cx="8994476" cy="461665"/>
-          </a:xfrm>
-          <a:prstGeom prst="rect">
-            <a:avLst/>
-          </a:prstGeom>
-          <a:noFill/>
-        </p:spPr>
-        <p:txBody>
-          <a:bodyPr wrap="square" rtlCol="0">
-            <a:spAutoFit/>
-          </a:bodyPr>
-          <a:lstStyle/>
-          <a:p>
-            <a:pPr algn="ctr"/>
-            <a:r>
-              <a:rPr lang="fr-FR" sz="1200" dirty="0"/>
-              <a:t>Le challenger n’est promu que s’il améliore la performance globale d’au moins 0.1 sans dégrader les métriques fraude au seuil opérationnel</a:t>
-            </a:r>
-          </a:p>
-        </p:txBody>
-      </p:sp>
     </p:spTree>
   </p:cSld>
   <p:clrMapOvr>
@@ -20196,7 +20178,7 @@
               </a:pPr>
               <a:r>
                 <a:rPr lang="fr-FR" dirty="0"/>
-                <a:t>CI Github Actions</a:t>
+                <a:t>CI GitHub Actions</a:t>
               </a:r>
             </a:p>
             <a:p>
@@ -20341,7 +20323,7 @@
               </a:pPr>
               <a:r>
                 <a:rPr lang="fr-FR" dirty="0"/>
-                <a:t>Flux labellisé / non labellisé séparés</a:t>
+                <a:t>Séparation des Flux labellisé / non labellisé</a:t>
               </a:r>
             </a:p>
             <a:p>
